--- a/DCM_Weekly_June_29_2026.pptx
+++ b/DCM_Weekly_June_29_2026.pptx
@@ -6537,7 +6537,7 @@
                 </a:solidFill>
                 <a:latin typeface="Calibri"/>
               </a:rPr>
-              <a:t>For Prime Bank Officials - Internal Usage Only</a:t>
+              <a:t>Industry Professionals Only - Domestic Bangladeshi Market</a:t>
             </a:r>
           </a:p>
         </p:txBody>
@@ -6607,7 +6607,7 @@
                 </a:solidFill>
                 <a:latin typeface="Calibri"/>
               </a:rPr>
-              <a:t>Md. Sohel Rahman, Debt Capital Market</a:t>
+              <a:t>Md. Sohel Rahman</a:t>
             </a:r>
           </a:p>
         </p:txBody>

--- a/DCM_Weekly_June_29_2026.pptx
+++ b/DCM_Weekly_June_29_2026.pptx
@@ -6344,7 +6344,7 @@
                 </a:solidFill>
                 <a:latin typeface="Cambria"/>
               </a:rPr>
-              <a:t>DCM Weekly : দেশী Macro</a:t>
+              <a:t>The DCM Weekly : দেশী Macro</a:t>
             </a:r>
           </a:p>
         </p:txBody>
